--- a/review1-ppt/RoadAssist-Review1-SWE4004.pptx
+++ b/review1-ppt/RoadAssist-Review1-SWE4004.pptx
@@ -5362,7 +5362,7 @@
                 <a:ea typeface="Calibri" pitchFamily="34" charset="-122"/>
                 <a:cs typeface="Calibri" pitchFamily="34" charset="-120"/>
               </a:rPr>
-              <a:t>Docker containers on Kubernetes nodes</a:t>
+              <a:t>Docker containers (Kubernetes nodes are the target, not deployed)</a:t>
             </a:r>
             <a:endParaRPr lang="en-US" sz="940" dirty="0"/>
           </a:p>
@@ -5533,7 +5533,7 @@
                 <a:ea typeface="Calibri" pitchFamily="34" charset="-122"/>
                 <a:cs typeface="Calibri" pitchFamily="34" charset="-120"/>
               </a:rPr>
-              <a:t>REST over HTTPS, WebSocket for live tracking, and a Progressive Web App client</a:t>
+              <a:t>REST over HTTPS, server-sent events for live tracking, and a Progressive Web App client</a:t>
             </a:r>
             <a:endParaRPr lang="en-US" sz="1050" dirty="0"/>
           </a:p>
@@ -6532,7 +6532,7 @@
                 <a:ea typeface="Calibri" pitchFamily="34" charset="-122"/>
                 <a:cs typeface="Calibri" pitchFamily="34" charset="-120"/>
               </a:rPr>
-              <a:t>Kubernetes worker nodes built from hardened, pre-patched machine images. Nodes are replaceable, never repaired in place.</a:t>
+              <a:t>TARGET: Kubernetes worker nodes built from hardened, pre-patched machine images. Nodes replaceable, never repaired in place.</a:t>
             </a:r>
             <a:endParaRPr lang="en-US" sz="1080" dirty="0"/>
           </a:p>
@@ -6878,7 +6878,7 @@
                 <a:ea typeface="Calibri" pitchFamily="34" charset="-122"/>
                 <a:cs typeface="Calibri" pitchFamily="34" charset="-120"/>
               </a:rPr>
-              <a:t>Metrics, logs and distributed traces collected for every request — feeding autoscaling, billing visibility and SLO alerts.</a:t>
+              <a:t>BUILT: structured logs with a request id and per-operation duration. TARGET: distributed traces feeding autoscaling and SLO alerts.</a:t>
             </a:r>
             <a:endParaRPr lang="en-US" sz="1080" dirty="0"/>
           </a:p>
@@ -7051,7 +7051,7 @@
                 <a:ea typeface="Calibri" pitchFamily="34" charset="-122"/>
                 <a:cs typeface="Calibri" pitchFamily="34" charset="-120"/>
               </a:rPr>
-              <a:t>Database replicas across availability zones; stateless services replicated behind the load balancer; object storage replicated to a second region.</a:t>
+              <a:t>TARGET: database replicas across availability zones; stateless services replicated behind the load balancer; object storage replicated to a second region.</a:t>
             </a:r>
             <a:endParaRPr lang="en-US" sz="1080" dirty="0"/>
           </a:p>
@@ -8472,7 +8472,7 @@
                 <a:ea typeface="Calibri" pitchFamily="34" charset="-122"/>
                 <a:cs typeface="Calibri" pitchFamily="34" charset="-120"/>
               </a:rPr>
-              <a:t>Autoscaler adds pods when request queue depth rises, removes them when it falls</a:t>
+              <a:t>TARGET: autoscaler adds pods when request queue depth rises, removes them when it falls</a:t>
             </a:r>
             <a:endParaRPr lang="en-US" sz="1020" dirty="0"/>
           </a:p>
@@ -9327,7 +9327,7 @@
                 <a:ea typeface="Calibri" pitchFamily="34" charset="-122"/>
                 <a:cs typeface="Calibri" pitchFamily="34" charset="-120"/>
               </a:rPr>
-              <a:t>Primary and secondary storage replicated across zones with automatic failover</a:t>
+              <a:t>TARGET: primary and secondary storage replicated across zones with automatic failover</a:t>
             </a:r>
             <a:endParaRPr lang="en-US" sz="1020" dirty="0"/>
           </a:p>
@@ -9491,7 +9491,7 @@
                 <a:ea typeface="Calibri" pitchFamily="34" charset="-122"/>
                 <a:cs typeface="Calibri" pitchFamily="34" charset="-120"/>
               </a:rPr>
-              <a:t>LIVE</a:t>
+              <a:t>DESIGN</a:t>
             </a:r>
             <a:endParaRPr lang="en-US" sz="1000" dirty="0"/>
           </a:p>
@@ -9593,7 +9593,7 @@
                 <a:ea typeface="Calibri" pitchFamily="34" charset="-122"/>
                 <a:cs typeface="Calibri" pitchFamily="34" charset="-120"/>
               </a:rPr>
-              <a:t>Live: the autoscaler adding and releasing pods as queue depth rises and falls</a:t>
+              <a:t>Design: how the autoscaler would add and release pods as queue depth rises and falls</a:t>
             </a:r>
             <a:endParaRPr lang="en-US" sz="1000" dirty="0"/>
           </a:p>
@@ -9935,7 +9935,7 @@
                 <a:ea typeface="Calibri" pitchFamily="34" charset="-122"/>
                 <a:cs typeface="Calibri" pitchFamily="34" charset="-120"/>
               </a:rPr>
-              <a:t>The Horizontal Pod Autoscaler adds pods in 30 seconds; new pods join the load balancer only after passing a health check.</a:t>
+              <a:t>DESIGN: an HPA on queue depth, with a readiness gate so a pod joins only after a health check. BUILT: that readiness gate — /health returns 503 when the database is unreachable.</a:t>
             </a:r>
             <a:endParaRPr lang="en-US" sz="920" dirty="0"/>
           </a:p>
@@ -10106,7 +10106,7 @@
                 <a:ea typeface="Calibri" pitchFamily="34" charset="-122"/>
                 <a:cs typeface="Calibri" pitchFamily="34" charset="-120"/>
               </a:rPr>
-              <a:t>If the existing nodes cannot host the new pods, the cluster autoscaler adds nodes — elastic resource capacity in the Module 4 sense.</a:t>
+              <a:t>DESIGN: if the existing nodes cannot host the new pods, the cluster autoscaler adds nodes — elastic resource capacity in the Module 4 sense.</a:t>
             </a:r>
             <a:endParaRPr lang="en-US" sz="920" dirty="0"/>
           </a:p>
@@ -10432,7 +10432,7 @@
                 <a:ea typeface="Calibri" pitchFamily="34" charset="-122"/>
                 <a:cs typeface="Calibri" pitchFamily="34" charset="-120"/>
               </a:rPr>
-              <a:t>LIVE</a:t>
+              <a:t>DESIGN</a:t>
             </a:r>
             <a:endParaRPr lang="en-US" sz="1000" dirty="0"/>
           </a:p>
@@ -10743,7 +10743,7 @@
                 <a:ea typeface="Calibri" pitchFamily="34" charset="-122"/>
                 <a:cs typeface="Calibri" pitchFamily="34" charset="-120"/>
               </a:rPr>
-              <a:t>Three synchronised replicas across three availability zones. When Zone C is lost the remaining two keep serving with zero data loss — this is why the emergency service can promise 99.99%.</a:t>
+              <a:t>TARGET: three synchronised replicas across three availability zones, so losing a zone costs no data. Not deployed — today it is one node with a documented backup procedure.</a:t>
             </a:r>
             <a:endParaRPr lang="en-US" sz="1050" dirty="0"/>
           </a:p>
@@ -12152,7 +12152,7 @@
                 <a:ea typeface="Calibri" pitchFamily="34" charset="-122"/>
                 <a:cs typeface="Calibri" pitchFamily="34" charset="-120"/>
               </a:rPr>
-              <a:t>Auto-scaling pods on managed Kubernetes  ·  stateless  ·  replicated across 3 availability zones</a:t>
+              <a:t>TARGET: auto-scaling pods on managed Kubernetes · stateless · replicated across 3 AZs.  TODAY: one stateless container.</a:t>
             </a:r>
             <a:endParaRPr lang="en-US" sz="880" dirty="0"/>
           </a:p>
@@ -12922,7 +12922,7 @@
                 <a:ea typeface="Calibri" pitchFamily="34" charset="-122"/>
                 <a:cs typeface="Calibri" pitchFamily="34" charset="-120"/>
               </a:rPr>
-              <a:t>Live VM migration — workloads move between hosts with no downtime during maintenance</a:t>
+              <a:t>TARGET: live VM migration — workloads move between hosts with no downtime during maintenance</a:t>
             </a:r>
             <a:endParaRPr lang="en-US" sz="1100" dirty="0"/>
           </a:p>
@@ -14563,7 +14563,7 @@
                 <a:ea typeface="Calibri" pitchFamily="34" charset="-122"/>
                 <a:cs typeface="Calibri" pitchFamily="34" charset="-120"/>
               </a:rPr>
-              <a:t>We consume managed Kubernetes, managed PostgreSQL and a managed message queue — no patching, no failover scripts.</a:t>
+              <a:t>TARGET: we would consume managed Kubernetes, managed PostgreSQL and a managed message queue — no patching, no failover scripts.</a:t>
             </a:r>
             <a:endParaRPr lang="en-US" sz="1080" dirty="0"/>
           </a:p>
@@ -20535,7 +20535,7 @@
                 <a:ea typeface="Calibri" pitchFamily="34" charset="-122"/>
                 <a:cs typeface="Calibri" pitchFamily="34" charset="-120"/>
               </a:rPr>
-              <a:t>Live location streamed over WebSocket until the mechanic arrives</a:t>
+              <a:t>Live location streamed over server-sent events until the mechanic arrives</a:t>
             </a:r>
             <a:endParaRPr lang="en-US" sz="960" dirty="0"/>
           </a:p>
@@ -22914,7 +22914,7 @@
                 <a:ea typeface="Calibri" pitchFamily="34" charset="-122"/>
                 <a:cs typeface="Calibri" pitchFamily="34" charset="-120"/>
               </a:rPr>
-              <a:t>LIVE</a:t>
+              <a:t>DEMO</a:t>
             </a:r>
             <a:endParaRPr lang="en-US" sz="1000" dirty="0"/>
           </a:p>
@@ -23469,7 +23469,7 @@
                 <a:ea typeface="Calibri" pitchFamily="34" charset="-122"/>
                 <a:cs typeface="Calibri" pitchFamily="34" charset="-120"/>
               </a:rPr>
-              <a:t>SMS with a live location link, sent through the isolated emergency service</a:t>
+              <a:t>SMS with a live location link. (Isolated emergency service is a target; today it is a module in the same process.)</a:t>
             </a:r>
             <a:endParaRPr lang="en-US" sz="860" dirty="0"/>
           </a:p>
@@ -25106,7 +25106,7 @@
                 <a:ea typeface="Calibri" pitchFamily="34" charset="-122"/>
                 <a:cs typeface="Calibri" pitchFamily="34" charset="-120"/>
               </a:rPr>
-              <a:t>Cloud infrastructure provisioned</a:t>
+              <a:t>Cloud infrastructure DESIGNED — not provisioned</a:t>
             </a:r>
             <a:endParaRPr lang="en-US" sz="1100" dirty="0"/>
           </a:p>
@@ -25145,7 +25145,7 @@
                 <a:ea typeface="Calibri" pitchFamily="34" charset="-122"/>
                 <a:cs typeface="Calibri" pitchFamily="34" charset="-120"/>
               </a:rPr>
-              <a:t>Virtual network, subnets, security groups, Kubernetes cluster</a:t>
+              <a:t>Virtual network, subnets, security groups, Kubernetes cluster — none deployed</a:t>
             </a:r>
             <a:endParaRPr lang="en-US" sz="920" dirty="0"/>
           </a:p>
@@ -25824,7 +25824,7 @@
                 <a:ea typeface="Calibri" pitchFamily="34" charset="-122"/>
                 <a:cs typeface="Calibri" pitchFamily="34" charset="-120"/>
               </a:rPr>
-              <a:t>Kubernetes (managed)</a:t>
+              <a:t>Kubernetes (managed) — target</a:t>
             </a:r>
             <a:endParaRPr lang="en-US" sz="1050" dirty="0"/>
           </a:p>
@@ -27380,7 +27380,7 @@
                 <a:ea typeface="Calibri" pitchFamily="34" charset="-122"/>
                 <a:cs typeface="Calibri" pitchFamily="34" charset="-120"/>
               </a:rPr>
-              <a:t>All services deployed and auto-scaling · AI diagnosis live · offline engine · SMS and IVR working end to end</a:t>
+              <a:t>ROADMAP: all services deployed and auto-scaling.  TODAY: AI diagnosis, offline engine and inbound SMS work end to end.</a:t>
             </a:r>
             <a:endParaRPr lang="en-US" sz="1150" dirty="0"/>
           </a:p>
@@ -28948,7 +28948,7 @@
                 <a:ea typeface="Calibri" pitchFamily="34" charset="-122"/>
                 <a:cs typeface="Calibri" pitchFamily="34" charset="-120"/>
               </a:rPr>
-              <a:t>answered by dynamic scalability, elastic capacity and cloud bursting</a:t>
+              <a:t>answered in the design by dynamic scalability, elastic capacity and cloud bursting</a:t>
             </a:r>
             <a:endParaRPr lang="en-US" sz="1100" dirty="0"/>
           </a:p>
@@ -29060,7 +29060,7 @@
                 <a:ea typeface="Calibri" pitchFamily="34" charset="-122"/>
                 <a:cs typeface="Calibri" pitchFamily="34" charset="-120"/>
               </a:rPr>
-              <a:t>answered by multi-AZ replication, redundant storage and load balancing</a:t>
+              <a:t>answered today by on-device Off-Grid Mode; multi-AZ replication and redundant storage are design</a:t>
             </a:r>
             <a:endParaRPr lang="en-US" sz="1100" dirty="0"/>
           </a:p>
@@ -32452,7 +32452,7 @@
                 <a:ea typeface="Calibri" pitchFamily="34" charset="-122"/>
                 <a:cs typeface="Calibri" pitchFamily="34" charset="-120"/>
               </a:rPr>
-              <a:t>Independently scalable, deployed on managed Kubernetes</a:t>
+              <a:t>Independently scalable by design — today one container, not on Kubernetes</a:t>
             </a:r>
             <a:endParaRPr lang="en-US" sz="880" dirty="0"/>
           </a:p>
@@ -32603,7 +32603,7 @@
                 <a:ea typeface="Calibri" pitchFamily="34" charset="-122"/>
                 <a:cs typeface="Calibri" pitchFamily="34" charset="-120"/>
               </a:rPr>
-              <a:t>Every stateless service replicated; database with multi-AZ failover</a:t>
+              <a:t>TARGET: stateless services replicated; database with multi-AZ failover</a:t>
             </a:r>
             <a:endParaRPr lang="en-US" sz="880" dirty="0"/>
           </a:p>
@@ -33795,7 +33795,7 @@
                 <a:ea typeface="Calibri" pitchFamily="34" charset="-122"/>
                 <a:cs typeface="Calibri" pitchFamily="34" charset="-120"/>
               </a:rPr>
-              <a:t>The emergency service is replicated across availability zones</a:t>
+              <a:t>TARGET: the emergency service replicated across availability zones</a:t>
             </a:r>
             <a:endParaRPr lang="en-US" sz="1050" dirty="0"/>
           </a:p>
@@ -34511,7 +34511,7 @@
                 <a:ea typeface="Calibri" pitchFamily="34" charset="-122"/>
                 <a:cs typeface="Calibri" pitchFamily="34" charset="-120"/>
               </a:rPr>
-              <a:t>Managed Kubernetes, managed PostgreSQL, managed message queue</a:t>
+              <a:t>TARGET PaaS: managed Kubernetes, PostgreSQL, message queue — not provisioned</a:t>
             </a:r>
             <a:endParaRPr lang="en-US" sz="1080" dirty="0"/>
           </a:p>
